--- a/assets/memos/E7-memo.pptx
+++ b/assets/memos/E7-memo.pptx
@@ -3105,8 +3105,8 @@
         </p:nvSpPr>
         <p:spPr>
           <a:xfrm>
-            <a:off x="648000" y="1180800"/>
-            <a:ext cx="5058000" cy="511200"/>
+            <a:off x="532800" y="1180800"/>
+            <a:ext cx="6490800" cy="511200"/>
           </a:xfrm>
           <a:prstGeom prst="rect">
             <a:avLst/>
@@ -3128,7 +3128,7 @@
               </a:spcAft>
             </a:pPr>
             <a:r>
-              <a:rPr sz="2000" b="1" i="0">
+              <a:rPr sz="1800" b="1" i="0">
                 <a:solidFill>
                   <a:srgbClr val="4388BC"/>
                 </a:solidFill>
@@ -4543,8 +4543,8 @@
         </p:nvSpPr>
         <p:spPr>
           <a:xfrm>
-            <a:off x="648000" y="1180800"/>
-            <a:ext cx="5058000" cy="511200"/>
+            <a:off x="532800" y="1180800"/>
+            <a:ext cx="6490800" cy="511200"/>
           </a:xfrm>
           <a:prstGeom prst="rect">
             <a:avLst/>
@@ -4566,7 +4566,7 @@
               </a:spcAft>
             </a:pPr>
             <a:r>
-              <a:rPr sz="2000" b="1" i="0">
+              <a:rPr sz="1800" b="1" i="0">
                 <a:solidFill>
                   <a:srgbClr val="4388BC"/>
                 </a:solidFill>

--- a/assets/memos/E7-memo.pptx
+++ b/assets/memos/E7-memo.pptx
@@ -3421,7 +3421,7 @@
                 </a:solidFill>
                 <a:latin typeface="Arial"/>
               </a:rPr>
-              <a:t>→ L'IA, c'est la capacité d'une machine à imiter certaines fonction…</a:t>
+              <a:t>→ L'IA, c'est la capacité d'une machine à imiter certaines fonctions humaines : comprendre le langage, reconnaître des images, prendre des décisions ou apprendre de ses erreurs.</a:t>
             </a:r>
           </a:p>
           <a:p>
@@ -3440,7 +3440,7 @@
                 </a:solidFill>
                 <a:latin typeface="Arial"/>
               </a:rPr>
-              <a:t>→ Pensez à un enfant qui apprend à reconnaître un chat en voyant be…</a:t>
+              <a:t>→ Pensez à un enfant qui apprend à reconnaître un chat en voyant beaucoup de photos. L'IA fait pareil, mais avec des millions d'exemples et en quelques secondes.</a:t>
             </a:r>
           </a:p>
           <a:p>
@@ -3459,7 +3459,7 @@
                 </a:solidFill>
                 <a:latin typeface="Arial"/>
               </a:rPr>
-              <a:t>→ L'IA n'est pas magique : c'est un programme informatique, écrit p…</a:t>
+              <a:t>→ L'IA n'est pas magique : c'est un programme informatique, écrit par des humains, qui suit des règles très précises.</a:t>
             </a:r>
           </a:p>
         </p:txBody>
@@ -4014,7 +4014,7 @@
                 </a:solidFill>
                 <a:latin typeface="Arial"/>
               </a:rPr>
-              <a:t>→ L'IA repose sur un principe simple : apprendre à partir d'exemple…</a:t>
+              <a:t>→ L'IA repose sur un principe simple : apprendre à partir d'exemples, comme nous le faisons, mais à une échelle colossale.</a:t>
             </a:r>
           </a:p>
           <a:p>
@@ -4052,7 +4052,7 @@
                 </a:solidFill>
                 <a:latin typeface="Arial"/>
               </a:rPr>
-              <a:t>→ Plus on lui donne de données, plus elle devient précise. C'est po…</a:t>
+              <a:t>→ Plus on lui donne de données, plus elle devient précise. C'est pour cela qu'elle s'améliore constamment avec le temps.</a:t>
             </a:r>
           </a:p>
         </p:txBody>
@@ -4443,7 +4443,7 @@
                 </a:solidFill>
                 <a:latin typeface="Arial"/>
               </a:rPr>
-              <a:t>→ Suite en page 2 : ASSISTANTS VOCAUX | IA CONVERSATIONNELLE | L'IA dans la santé, les transports et les ser…</a:t>
+              <a:t>→ Suite en page 2 : ASSISTANTS VOCAUX | IA CONVERSATIONNELLE | L'IA dans la santé, les transports et les services publics</a:t>
             </a:r>
           </a:p>
           <a:p>
@@ -4859,7 +4859,7 @@
                 </a:solidFill>
                 <a:latin typeface="Arial"/>
               </a:rPr>
-              <a:t>→ Ces assistants comprennent votre voix et répondent à vos question…</a:t>
+              <a:t>→ Ces assistants comprennent votre voix et répondent à vos questions à voix haute. Ils sont conçus pour être simples, même pour les débutants.</a:t>
             </a:r>
           </a:p>
           <a:p>
@@ -5165,7 +5165,7 @@
                 </a:solidFill>
                 <a:latin typeface="Arial"/>
               </a:rPr>
-              <a:t>→ Une lettre, un email, un courrier administratif en quelques secon…</a:t>
+              <a:t>→ Une lettre, un email, un courrier administratif en quelques secondes</a:t>
             </a:r>
           </a:p>
           <a:p>
@@ -5203,7 +5203,7 @@
                 </a:solidFill>
                 <a:latin typeface="Arial"/>
               </a:rPr>
-              <a:t>→ Expliquer une facture, un contrat ou une démarche complexe simple…</a:t>
+              <a:t>→ Expliquer une facture, un contrat ou une démarche complexe simplement</a:t>
             </a:r>
           </a:p>
         </p:txBody>
@@ -5410,7 +5410,7 @@
                 </a:solidFill>
                 <a:latin typeface="Arial"/>
               </a:rPr>
-              <a:t>L'IA dans la santé, les transports et les ser…</a:t>
+              <a:t>L'IA dans la santé, les transports et les services publics</a:t>
             </a:r>
           </a:p>
         </p:txBody>
@@ -5471,7 +5471,7 @@
                 </a:solidFill>
                 <a:latin typeface="Arial"/>
               </a:rPr>
-              <a:t>→ En Lot-et-Garonne comme partout en France, l'IA commence à simpli…</a:t>
+              <a:t>→ En Lot-et-Garonne comme partout en France, l'IA commence à simplifier les démarches du quotidien :</a:t>
             </a:r>
           </a:p>
           <a:p>

--- a/assets/memos/E7-memo.pptx
+++ b/assets/memos/E7-memo.pptx
@@ -3167,7 +3167,7 @@
         <p:spPr>
           <a:xfrm>
             <a:off x="532800" y="1749600"/>
-            <a:ext cx="6490800" cy="1371600"/>
+            <a:ext cx="6490800" cy="1987199"/>
           </a:xfrm>
           <a:prstGeom prst="rect">
             <a:avLst/>
@@ -3208,7 +3208,7 @@
         <p:spPr>
           <a:xfrm>
             <a:off x="532800" y="1749600"/>
-            <a:ext cx="572400" cy="1371600"/>
+            <a:ext cx="572400" cy="1987199"/>
           </a:xfrm>
           <a:prstGeom prst="rect">
             <a:avLst/>
@@ -3374,7 +3374,7 @@
         <p:spPr>
           <a:xfrm>
             <a:off x="1159200" y="2214000"/>
-            <a:ext cx="5828400" cy="885600"/>
+            <a:ext cx="5828400" cy="1486800"/>
           </a:xfrm>
           <a:prstGeom prst="rect">
             <a:avLst/>
@@ -3472,7 +3472,7 @@
         </p:nvSpPr>
         <p:spPr>
           <a:xfrm>
-            <a:off x="532800" y="3186000"/>
+            <a:off x="532800" y="3801599"/>
             <a:ext cx="6490800" cy="1371600"/>
           </a:xfrm>
           <a:prstGeom prst="rect">
@@ -3513,7 +3513,7 @@
         </p:nvSpPr>
         <p:spPr>
           <a:xfrm>
-            <a:off x="532800" y="3186000"/>
+            <a:off x="532800" y="3801599"/>
             <a:ext cx="572400" cy="1371600"/>
           </a:xfrm>
           <a:prstGeom prst="rect">
@@ -3554,7 +3554,7 @@
         </p:nvSpPr>
         <p:spPr>
           <a:xfrm>
-            <a:off x="1206000" y="3607200"/>
+            <a:off x="1206000" y="4222799"/>
             <a:ext cx="5752800" cy="7200"/>
           </a:xfrm>
           <a:prstGeom prst="rect">
@@ -3595,7 +3595,7 @@
         </p:nvSpPr>
         <p:spPr>
           <a:xfrm>
-            <a:off x="532800" y="3252600"/>
+            <a:off x="532800" y="3868199"/>
             <a:ext cx="572400" cy="288000"/>
           </a:xfrm>
           <a:prstGeom prst="rect">
@@ -3637,7 +3637,7 @@
         </p:nvSpPr>
         <p:spPr>
           <a:xfrm>
-            <a:off x="1177200" y="3221999"/>
+            <a:off x="1177200" y="3837599"/>
             <a:ext cx="5810400" cy="370799"/>
           </a:xfrm>
           <a:prstGeom prst="rect">
@@ -3679,8 +3679,8 @@
         </p:nvSpPr>
         <p:spPr>
           <a:xfrm>
-            <a:off x="1159200" y="3650399"/>
-            <a:ext cx="5828400" cy="885600"/>
+            <a:off x="1159200" y="4265999"/>
+            <a:ext cx="5828400" cy="871200"/>
           </a:xfrm>
           <a:prstGeom prst="rect">
             <a:avLst/>
@@ -3778,8 +3778,8 @@
         </p:nvSpPr>
         <p:spPr>
           <a:xfrm>
-            <a:off x="532800" y="4622400"/>
-            <a:ext cx="6490800" cy="1371600"/>
+            <a:off x="532800" y="5238000"/>
+            <a:ext cx="6490800" cy="1382400"/>
           </a:xfrm>
           <a:prstGeom prst="rect">
             <a:avLst/>
@@ -3819,8 +3819,8 @@
         </p:nvSpPr>
         <p:spPr>
           <a:xfrm>
-            <a:off x="532800" y="4622400"/>
-            <a:ext cx="572400" cy="1371600"/>
+            <a:off x="532800" y="5238000"/>
+            <a:ext cx="572400" cy="1382400"/>
           </a:xfrm>
           <a:prstGeom prst="rect">
             <a:avLst/>
@@ -3860,7 +3860,7 @@
         </p:nvSpPr>
         <p:spPr>
           <a:xfrm>
-            <a:off x="1206000" y="5043600"/>
+            <a:off x="1206000" y="5659200"/>
             <a:ext cx="5752800" cy="7200"/>
           </a:xfrm>
           <a:prstGeom prst="rect">
@@ -3901,7 +3901,7 @@
         </p:nvSpPr>
         <p:spPr>
           <a:xfrm>
-            <a:off x="532800" y="4689000"/>
+            <a:off x="532800" y="5304600"/>
             <a:ext cx="572400" cy="288000"/>
           </a:xfrm>
           <a:prstGeom prst="rect">
@@ -3943,7 +3943,7 @@
         </p:nvSpPr>
         <p:spPr>
           <a:xfrm>
-            <a:off x="1177200" y="4658400"/>
+            <a:off x="1177200" y="5273999"/>
             <a:ext cx="5810400" cy="370799"/>
           </a:xfrm>
           <a:prstGeom prst="rect">
@@ -3985,8 +3985,8 @@
         </p:nvSpPr>
         <p:spPr>
           <a:xfrm>
-            <a:off x="1159200" y="5086800"/>
-            <a:ext cx="5828400" cy="885600"/>
+            <a:off x="1159200" y="5702399"/>
+            <a:ext cx="5828400" cy="881999"/>
           </a:xfrm>
           <a:prstGeom prst="rect">
             <a:avLst/>
@@ -4065,7 +4065,7 @@
         </p:nvSpPr>
         <p:spPr>
           <a:xfrm>
-            <a:off x="532800" y="6058799"/>
+            <a:off x="532800" y="6685200"/>
             <a:ext cx="6490800" cy="1371600"/>
           </a:xfrm>
           <a:prstGeom prst="rect">
@@ -4106,7 +4106,7 @@
         </p:nvSpPr>
         <p:spPr>
           <a:xfrm>
-            <a:off x="532800" y="6058799"/>
+            <a:off x="532800" y="6685200"/>
             <a:ext cx="572400" cy="1371600"/>
           </a:xfrm>
           <a:prstGeom prst="rect">
@@ -4147,7 +4147,7 @@
         </p:nvSpPr>
         <p:spPr>
           <a:xfrm>
-            <a:off x="1206000" y="6480000"/>
+            <a:off x="1206000" y="7106400"/>
             <a:ext cx="5752800" cy="7200"/>
           </a:xfrm>
           <a:prstGeom prst="rect">
@@ -4188,7 +4188,7 @@
         </p:nvSpPr>
         <p:spPr>
           <a:xfrm>
-            <a:off x="532800" y="6125399"/>
+            <a:off x="532800" y="6751800"/>
             <a:ext cx="572400" cy="288000"/>
           </a:xfrm>
           <a:prstGeom prst="rect">
@@ -4230,7 +4230,7 @@
         </p:nvSpPr>
         <p:spPr>
           <a:xfrm>
-            <a:off x="1177200" y="6094800"/>
+            <a:off x="1177200" y="6721200"/>
             <a:ext cx="5810400" cy="370799"/>
           </a:xfrm>
           <a:prstGeom prst="rect">
@@ -4272,8 +4272,8 @@
         </p:nvSpPr>
         <p:spPr>
           <a:xfrm>
-            <a:off x="1159200" y="6523200"/>
-            <a:ext cx="5828400" cy="885600"/>
+            <a:off x="1159200" y="7149600"/>
+            <a:ext cx="5828400" cy="871200"/>
           </a:xfrm>
           <a:prstGeom prst="rect">
             <a:avLst/>
@@ -4371,7 +4371,7 @@
         </p:nvSpPr>
         <p:spPr>
           <a:xfrm>
-            <a:off x="532800" y="7639200"/>
+            <a:off x="532800" y="8193599"/>
             <a:ext cx="6490800" cy="658800"/>
           </a:xfrm>
           <a:prstGeom prst="rect">
@@ -4414,7 +4414,7 @@
         </p:nvSpPr>
         <p:spPr>
           <a:xfrm>
-            <a:off x="1540799" y="7675200"/>
+            <a:off x="1540799" y="8229600"/>
             <a:ext cx="5410800" cy="604800"/>
           </a:xfrm>
           <a:prstGeom prst="rect">
@@ -4605,7 +4605,7 @@
         <p:spPr>
           <a:xfrm>
             <a:off x="532800" y="1749600"/>
-            <a:ext cx="6490800" cy="1371600"/>
+            <a:ext cx="6490800" cy="1382400"/>
           </a:xfrm>
           <a:prstGeom prst="rect">
             <a:avLst/>
@@ -4646,7 +4646,7 @@
         <p:spPr>
           <a:xfrm>
             <a:off x="532800" y="1749600"/>
-            <a:ext cx="572400" cy="1371600"/>
+            <a:ext cx="572400" cy="1382400"/>
           </a:xfrm>
           <a:prstGeom prst="rect">
             <a:avLst/>
@@ -4812,7 +4812,7 @@
         <p:spPr>
           <a:xfrm>
             <a:off x="1159200" y="2214000"/>
-            <a:ext cx="5828400" cy="885600"/>
+            <a:ext cx="5828400" cy="881999"/>
           </a:xfrm>
           <a:prstGeom prst="rect">
             <a:avLst/>
@@ -4910,7 +4910,7 @@
         </p:nvSpPr>
         <p:spPr>
           <a:xfrm>
-            <a:off x="532800" y="3186000"/>
+            <a:off x="532800" y="3196799"/>
             <a:ext cx="6490800" cy="1371600"/>
           </a:xfrm>
           <a:prstGeom prst="rect">
@@ -4951,7 +4951,7 @@
         </p:nvSpPr>
         <p:spPr>
           <a:xfrm>
-            <a:off x="532800" y="3186000"/>
+            <a:off x="532800" y="3196799"/>
             <a:ext cx="572400" cy="1371600"/>
           </a:xfrm>
           <a:prstGeom prst="rect">
@@ -4992,7 +4992,7 @@
         </p:nvSpPr>
         <p:spPr>
           <a:xfrm>
-            <a:off x="1206000" y="3607200"/>
+            <a:off x="1206000" y="3617999"/>
             <a:ext cx="5752800" cy="7200"/>
           </a:xfrm>
           <a:prstGeom prst="rect">
@@ -5033,7 +5033,7 @@
         </p:nvSpPr>
         <p:spPr>
           <a:xfrm>
-            <a:off x="532800" y="3252600"/>
+            <a:off x="532800" y="3263400"/>
             <a:ext cx="572400" cy="288000"/>
           </a:xfrm>
           <a:prstGeom prst="rect">
@@ -5075,7 +5075,7 @@
         </p:nvSpPr>
         <p:spPr>
           <a:xfrm>
-            <a:off x="1177200" y="3221999"/>
+            <a:off x="1177200" y="3232799"/>
             <a:ext cx="5810400" cy="370799"/>
           </a:xfrm>
           <a:prstGeom prst="rect">
@@ -5117,8 +5117,8 @@
         </p:nvSpPr>
         <p:spPr>
           <a:xfrm>
-            <a:off x="1159200" y="3650399"/>
-            <a:ext cx="5828400" cy="885600"/>
+            <a:off x="1159200" y="3661199"/>
+            <a:ext cx="5828400" cy="871200"/>
           </a:xfrm>
           <a:prstGeom prst="rect">
             <a:avLst/>
@@ -5216,8 +5216,8 @@
         </p:nvSpPr>
         <p:spPr>
           <a:xfrm>
-            <a:off x="532800" y="4622400"/>
-            <a:ext cx="6490800" cy="1371600"/>
+            <a:off x="532800" y="4633200"/>
+            <a:ext cx="6490800" cy="1382400"/>
           </a:xfrm>
           <a:prstGeom prst="rect">
             <a:avLst/>
@@ -5257,8 +5257,8 @@
         </p:nvSpPr>
         <p:spPr>
           <a:xfrm>
-            <a:off x="532800" y="4622400"/>
-            <a:ext cx="572400" cy="1371600"/>
+            <a:off x="532800" y="4633200"/>
+            <a:ext cx="572400" cy="1382400"/>
           </a:xfrm>
           <a:prstGeom prst="rect">
             <a:avLst/>
@@ -5298,7 +5298,7 @@
         </p:nvSpPr>
         <p:spPr>
           <a:xfrm>
-            <a:off x="1206000" y="5043600"/>
+            <a:off x="1206000" y="5054400"/>
             <a:ext cx="5752800" cy="7200"/>
           </a:xfrm>
           <a:prstGeom prst="rect">
@@ -5339,7 +5339,7 @@
         </p:nvSpPr>
         <p:spPr>
           <a:xfrm>
-            <a:off x="532800" y="4689000"/>
+            <a:off x="532800" y="4699800"/>
             <a:ext cx="572400" cy="288000"/>
           </a:xfrm>
           <a:prstGeom prst="rect">
@@ -5381,7 +5381,7 @@
         </p:nvSpPr>
         <p:spPr>
           <a:xfrm>
-            <a:off x="1177200" y="4658400"/>
+            <a:off x="1177200" y="4669200"/>
             <a:ext cx="5810400" cy="370799"/>
           </a:xfrm>
           <a:prstGeom prst="rect">
@@ -5423,8 +5423,8 @@
         </p:nvSpPr>
         <p:spPr>
           <a:xfrm>
-            <a:off x="1159200" y="5086800"/>
-            <a:ext cx="5828400" cy="885600"/>
+            <a:off x="1159200" y="5097599"/>
+            <a:ext cx="5828400" cy="881999"/>
           </a:xfrm>
           <a:prstGeom prst="rect">
             <a:avLst/>

--- a/assets/memos/E7-memo.pptx
+++ b/assets/memos/E7-memo.pptx
@@ -3097,9 +3097,35 @@
         <p:nvPr/>
       </p:nvGrpSpPr>
       <p:grpSpPr/>
-      <p:sp>
-        <p:nvSpPr>
-          <p:cNvPr id="2" name="TextBox 1"/>
+      <p:pic>
+        <p:nvPicPr>
+          <p:cNvPr id="2" name="Picture 1" descr="bg-p1.png"/>
+          <p:cNvPicPr>
+            <a:picLocks noChangeAspect="1"/>
+          </p:cNvPicPr>
+          <p:nvPr/>
+        </p:nvPicPr>
+        <p:blipFill>
+          <a:blip r:embed="rId2">
+            <a:alphaModFix amt="80000"/>
+          </a:blip>
+          <a:stretch>
+            <a:fillRect/>
+          </a:stretch>
+        </p:blipFill>
+        <p:spPr>
+          <a:xfrm>
+            <a:off x="0" y="0"/>
+            <a:ext cx="7556399" cy="10692000"/>
+          </a:xfrm>
+          <a:prstGeom prst="rect">
+            <a:avLst/>
+          </a:prstGeom>
+        </p:spPr>
+      </p:pic>
+      <p:sp>
+        <p:nvSpPr>
+          <p:cNvPr id="3" name="TextBox 2"/>
           <p:cNvSpPr txBox="1"/>
           <p:nvPr/>
         </p:nvSpPr>
@@ -3160,7 +3186,7 @@
       </p:sp>
       <p:sp>
         <p:nvSpPr>
-          <p:cNvPr id="3" name="Rectangle 2"/>
+          <p:cNvPr id="4" name="Rectangle 3"/>
           <p:cNvSpPr/>
           <p:nvPr/>
         </p:nvSpPr>
@@ -3201,7 +3227,7 @@
       </p:sp>
       <p:sp>
         <p:nvSpPr>
-          <p:cNvPr id="4" name="Rectangle 3"/>
+          <p:cNvPr id="5" name="Rectangle 4"/>
           <p:cNvSpPr/>
           <p:nvPr/>
         </p:nvSpPr>
@@ -3242,7 +3268,7 @@
       </p:sp>
       <p:sp>
         <p:nvSpPr>
-          <p:cNvPr id="5" name="Rectangle 4"/>
+          <p:cNvPr id="6" name="Rectangle 5"/>
           <p:cNvSpPr/>
           <p:nvPr/>
         </p:nvSpPr>
@@ -3283,7 +3309,7 @@
       </p:sp>
       <p:sp>
         <p:nvSpPr>
-          <p:cNvPr id="6" name="TextBox 5"/>
+          <p:cNvPr id="7" name="TextBox 6"/>
           <p:cNvSpPr txBox="1"/>
           <p:nvPr/>
         </p:nvSpPr>
@@ -3325,7 +3351,7 @@
       </p:sp>
       <p:sp>
         <p:nvSpPr>
-          <p:cNvPr id="7" name="TextBox 6"/>
+          <p:cNvPr id="8" name="TextBox 7"/>
           <p:cNvSpPr txBox="1"/>
           <p:nvPr/>
         </p:nvSpPr>
@@ -3367,7 +3393,7 @@
       </p:sp>
       <p:sp>
         <p:nvSpPr>
-          <p:cNvPr id="8" name="TextBox 7"/>
+          <p:cNvPr id="9" name="TextBox 8"/>
           <p:cNvSpPr txBox="1"/>
           <p:nvPr/>
         </p:nvSpPr>
@@ -3466,7 +3492,7 @@
       </p:sp>
       <p:sp>
         <p:nvSpPr>
-          <p:cNvPr id="9" name="Rectangle 8"/>
+          <p:cNvPr id="10" name="Rectangle 9"/>
           <p:cNvSpPr/>
           <p:nvPr/>
         </p:nvSpPr>
@@ -3507,7 +3533,7 @@
       </p:sp>
       <p:sp>
         <p:nvSpPr>
-          <p:cNvPr id="10" name="Rectangle 9"/>
+          <p:cNvPr id="11" name="Rectangle 10"/>
           <p:cNvSpPr/>
           <p:nvPr/>
         </p:nvSpPr>
@@ -3548,7 +3574,7 @@
       </p:sp>
       <p:sp>
         <p:nvSpPr>
-          <p:cNvPr id="11" name="Rectangle 10"/>
+          <p:cNvPr id="12" name="Rectangle 11"/>
           <p:cNvSpPr/>
           <p:nvPr/>
         </p:nvSpPr>
@@ -3589,7 +3615,7 @@
       </p:sp>
       <p:sp>
         <p:nvSpPr>
-          <p:cNvPr id="12" name="TextBox 11"/>
+          <p:cNvPr id="13" name="TextBox 12"/>
           <p:cNvSpPr txBox="1"/>
           <p:nvPr/>
         </p:nvSpPr>
@@ -3631,7 +3657,7 @@
       </p:sp>
       <p:sp>
         <p:nvSpPr>
-          <p:cNvPr id="13" name="TextBox 12"/>
+          <p:cNvPr id="14" name="TextBox 13"/>
           <p:cNvSpPr txBox="1"/>
           <p:nvPr/>
         </p:nvSpPr>
@@ -3673,7 +3699,7 @@
       </p:sp>
       <p:sp>
         <p:nvSpPr>
-          <p:cNvPr id="14" name="TextBox 13"/>
+          <p:cNvPr id="15" name="TextBox 14"/>
           <p:cNvSpPr txBox="1"/>
           <p:nvPr/>
         </p:nvSpPr>
@@ -3772,7 +3798,7 @@
       </p:sp>
       <p:sp>
         <p:nvSpPr>
-          <p:cNvPr id="15" name="Rectangle 14"/>
+          <p:cNvPr id="16" name="Rectangle 15"/>
           <p:cNvSpPr/>
           <p:nvPr/>
         </p:nvSpPr>
@@ -3813,7 +3839,7 @@
       </p:sp>
       <p:sp>
         <p:nvSpPr>
-          <p:cNvPr id="16" name="Rectangle 15"/>
+          <p:cNvPr id="17" name="Rectangle 16"/>
           <p:cNvSpPr/>
           <p:nvPr/>
         </p:nvSpPr>
@@ -3854,7 +3880,7 @@
       </p:sp>
       <p:sp>
         <p:nvSpPr>
-          <p:cNvPr id="17" name="Rectangle 16"/>
+          <p:cNvPr id="18" name="Rectangle 17"/>
           <p:cNvSpPr/>
           <p:nvPr/>
         </p:nvSpPr>
@@ -3895,7 +3921,7 @@
       </p:sp>
       <p:sp>
         <p:nvSpPr>
-          <p:cNvPr id="18" name="TextBox 17"/>
+          <p:cNvPr id="19" name="TextBox 18"/>
           <p:cNvSpPr txBox="1"/>
           <p:nvPr/>
         </p:nvSpPr>
@@ -3937,7 +3963,7 @@
       </p:sp>
       <p:sp>
         <p:nvSpPr>
-          <p:cNvPr id="19" name="TextBox 18"/>
+          <p:cNvPr id="20" name="TextBox 19"/>
           <p:cNvSpPr txBox="1"/>
           <p:nvPr/>
         </p:nvSpPr>
@@ -3979,7 +4005,7 @@
       </p:sp>
       <p:sp>
         <p:nvSpPr>
-          <p:cNvPr id="20" name="TextBox 19"/>
+          <p:cNvPr id="21" name="TextBox 20"/>
           <p:cNvSpPr txBox="1"/>
           <p:nvPr/>
         </p:nvSpPr>
@@ -4059,7 +4085,7 @@
       </p:sp>
       <p:sp>
         <p:nvSpPr>
-          <p:cNvPr id="21" name="Rectangle 20"/>
+          <p:cNvPr id="22" name="Rectangle 21"/>
           <p:cNvSpPr/>
           <p:nvPr/>
         </p:nvSpPr>
@@ -4100,7 +4126,7 @@
       </p:sp>
       <p:sp>
         <p:nvSpPr>
-          <p:cNvPr id="22" name="Rectangle 21"/>
+          <p:cNvPr id="23" name="Rectangle 22"/>
           <p:cNvSpPr/>
           <p:nvPr/>
         </p:nvSpPr>
@@ -4141,7 +4167,7 @@
       </p:sp>
       <p:sp>
         <p:nvSpPr>
-          <p:cNvPr id="23" name="Rectangle 22"/>
+          <p:cNvPr id="24" name="Rectangle 23"/>
           <p:cNvSpPr/>
           <p:nvPr/>
         </p:nvSpPr>
@@ -4182,7 +4208,7 @@
       </p:sp>
       <p:sp>
         <p:nvSpPr>
-          <p:cNvPr id="24" name="TextBox 23"/>
+          <p:cNvPr id="25" name="TextBox 24"/>
           <p:cNvSpPr txBox="1"/>
           <p:nvPr/>
         </p:nvSpPr>
@@ -4224,7 +4250,7 @@
       </p:sp>
       <p:sp>
         <p:nvSpPr>
-          <p:cNvPr id="25" name="TextBox 24"/>
+          <p:cNvPr id="26" name="TextBox 25"/>
           <p:cNvSpPr txBox="1"/>
           <p:nvPr/>
         </p:nvSpPr>
@@ -4266,7 +4292,7 @@
       </p:sp>
       <p:sp>
         <p:nvSpPr>
-          <p:cNvPr id="26" name="TextBox 25"/>
+          <p:cNvPr id="27" name="TextBox 26"/>
           <p:cNvSpPr txBox="1"/>
           <p:nvPr/>
         </p:nvSpPr>
@@ -4365,7 +4391,7 @@
       </p:sp>
       <p:sp>
         <p:nvSpPr>
-          <p:cNvPr id="27" name="Rectangle 26"/>
+          <p:cNvPr id="28" name="Rectangle 27"/>
           <p:cNvSpPr/>
           <p:nvPr/>
         </p:nvSpPr>
@@ -4408,7 +4434,7 @@
       </p:sp>
       <p:sp>
         <p:nvSpPr>
-          <p:cNvPr id="28" name="TextBox 27"/>
+          <p:cNvPr id="29" name="TextBox 28"/>
           <p:cNvSpPr txBox="1"/>
           <p:nvPr/>
         </p:nvSpPr>
@@ -4469,7 +4495,7 @@
       </p:sp>
       <p:sp>
         <p:nvSpPr>
-          <p:cNvPr id="29" name="TextBox 28"/>
+          <p:cNvPr id="30" name="TextBox 29"/>
           <p:cNvSpPr txBox="1"/>
           <p:nvPr/>
         </p:nvSpPr>
@@ -4535,9 +4561,35 @@
         <p:nvPr/>
       </p:nvGrpSpPr>
       <p:grpSpPr/>
-      <p:sp>
-        <p:nvSpPr>
-          <p:cNvPr id="2" name="TextBox 1"/>
+      <p:pic>
+        <p:nvPicPr>
+          <p:cNvPr id="2" name="Picture 1" descr="bg-p2.png"/>
+          <p:cNvPicPr>
+            <a:picLocks noChangeAspect="1"/>
+          </p:cNvPicPr>
+          <p:nvPr/>
+        </p:nvPicPr>
+        <p:blipFill>
+          <a:blip r:embed="rId2">
+            <a:alphaModFix amt="80000"/>
+          </a:blip>
+          <a:stretch>
+            <a:fillRect/>
+          </a:stretch>
+        </p:blipFill>
+        <p:spPr>
+          <a:xfrm>
+            <a:off x="0" y="0"/>
+            <a:ext cx="7556399" cy="10692000"/>
+          </a:xfrm>
+          <a:prstGeom prst="rect">
+            <a:avLst/>
+          </a:prstGeom>
+        </p:spPr>
+      </p:pic>
+      <p:sp>
+        <p:nvSpPr>
+          <p:cNvPr id="3" name="TextBox 2"/>
           <p:cNvSpPr txBox="1"/>
           <p:nvPr/>
         </p:nvSpPr>
@@ -4598,7 +4650,7 @@
       </p:sp>
       <p:sp>
         <p:nvSpPr>
-          <p:cNvPr id="3" name="Rectangle 2"/>
+          <p:cNvPr id="4" name="Rectangle 3"/>
           <p:cNvSpPr/>
           <p:nvPr/>
         </p:nvSpPr>
@@ -4639,7 +4691,7 @@
       </p:sp>
       <p:sp>
         <p:nvSpPr>
-          <p:cNvPr id="4" name="Rectangle 3"/>
+          <p:cNvPr id="5" name="Rectangle 4"/>
           <p:cNvSpPr/>
           <p:nvPr/>
         </p:nvSpPr>
@@ -4680,7 +4732,7 @@
       </p:sp>
       <p:sp>
         <p:nvSpPr>
-          <p:cNvPr id="5" name="Rectangle 4"/>
+          <p:cNvPr id="6" name="Rectangle 5"/>
           <p:cNvSpPr/>
           <p:nvPr/>
         </p:nvSpPr>
@@ -4721,7 +4773,7 @@
       </p:sp>
       <p:sp>
         <p:nvSpPr>
-          <p:cNvPr id="6" name="TextBox 5"/>
+          <p:cNvPr id="7" name="TextBox 6"/>
           <p:cNvSpPr txBox="1"/>
           <p:nvPr/>
         </p:nvSpPr>
@@ -4763,7 +4815,7 @@
       </p:sp>
       <p:sp>
         <p:nvSpPr>
-          <p:cNvPr id="7" name="TextBox 6"/>
+          <p:cNvPr id="8" name="TextBox 7"/>
           <p:cNvSpPr txBox="1"/>
           <p:nvPr/>
         </p:nvSpPr>
@@ -4805,7 +4857,7 @@
       </p:sp>
       <p:sp>
         <p:nvSpPr>
-          <p:cNvPr id="8" name="TextBox 7"/>
+          <p:cNvPr id="9" name="TextBox 8"/>
           <p:cNvSpPr txBox="1"/>
           <p:nvPr/>
         </p:nvSpPr>
@@ -4904,7 +4956,7 @@
       </p:sp>
       <p:sp>
         <p:nvSpPr>
-          <p:cNvPr id="9" name="Rectangle 8"/>
+          <p:cNvPr id="10" name="Rectangle 9"/>
           <p:cNvSpPr/>
           <p:nvPr/>
         </p:nvSpPr>
@@ -4945,7 +4997,7 @@
       </p:sp>
       <p:sp>
         <p:nvSpPr>
-          <p:cNvPr id="10" name="Rectangle 9"/>
+          <p:cNvPr id="11" name="Rectangle 10"/>
           <p:cNvSpPr/>
           <p:nvPr/>
         </p:nvSpPr>
@@ -4986,7 +5038,7 @@
       </p:sp>
       <p:sp>
         <p:nvSpPr>
-          <p:cNvPr id="11" name="Rectangle 10"/>
+          <p:cNvPr id="12" name="Rectangle 11"/>
           <p:cNvSpPr/>
           <p:nvPr/>
         </p:nvSpPr>
@@ -5027,7 +5079,7 @@
       </p:sp>
       <p:sp>
         <p:nvSpPr>
-          <p:cNvPr id="12" name="TextBox 11"/>
+          <p:cNvPr id="13" name="TextBox 12"/>
           <p:cNvSpPr txBox="1"/>
           <p:nvPr/>
         </p:nvSpPr>
@@ -5069,7 +5121,7 @@
       </p:sp>
       <p:sp>
         <p:nvSpPr>
-          <p:cNvPr id="13" name="TextBox 12"/>
+          <p:cNvPr id="14" name="TextBox 13"/>
           <p:cNvSpPr txBox="1"/>
           <p:nvPr/>
         </p:nvSpPr>
@@ -5111,7 +5163,7 @@
       </p:sp>
       <p:sp>
         <p:nvSpPr>
-          <p:cNvPr id="14" name="TextBox 13"/>
+          <p:cNvPr id="15" name="TextBox 14"/>
           <p:cNvSpPr txBox="1"/>
           <p:nvPr/>
         </p:nvSpPr>
@@ -5210,7 +5262,7 @@
       </p:sp>
       <p:sp>
         <p:nvSpPr>
-          <p:cNvPr id="15" name="Rectangle 14"/>
+          <p:cNvPr id="16" name="Rectangle 15"/>
           <p:cNvSpPr/>
           <p:nvPr/>
         </p:nvSpPr>
@@ -5251,7 +5303,7 @@
       </p:sp>
       <p:sp>
         <p:nvSpPr>
-          <p:cNvPr id="16" name="Rectangle 15"/>
+          <p:cNvPr id="17" name="Rectangle 16"/>
           <p:cNvSpPr/>
           <p:nvPr/>
         </p:nvSpPr>
@@ -5292,7 +5344,7 @@
       </p:sp>
       <p:sp>
         <p:nvSpPr>
-          <p:cNvPr id="17" name="Rectangle 16"/>
+          <p:cNvPr id="18" name="Rectangle 17"/>
           <p:cNvSpPr/>
           <p:nvPr/>
         </p:nvSpPr>
@@ -5333,7 +5385,7 @@
       </p:sp>
       <p:sp>
         <p:nvSpPr>
-          <p:cNvPr id="18" name="TextBox 17"/>
+          <p:cNvPr id="19" name="TextBox 18"/>
           <p:cNvSpPr txBox="1"/>
           <p:nvPr/>
         </p:nvSpPr>
@@ -5375,7 +5427,7 @@
       </p:sp>
       <p:sp>
         <p:nvSpPr>
-          <p:cNvPr id="19" name="TextBox 18"/>
+          <p:cNvPr id="20" name="TextBox 19"/>
           <p:cNvSpPr txBox="1"/>
           <p:nvPr/>
         </p:nvSpPr>
@@ -5417,7 +5469,7 @@
       </p:sp>
       <p:sp>
         <p:nvSpPr>
-          <p:cNvPr id="20" name="TextBox 19"/>
+          <p:cNvPr id="21" name="TextBox 20"/>
           <p:cNvSpPr txBox="1"/>
           <p:nvPr/>
         </p:nvSpPr>
@@ -5516,7 +5568,7 @@
       </p:sp>
       <p:sp>
         <p:nvSpPr>
-          <p:cNvPr id="21" name="Rectangle 20"/>
+          <p:cNvPr id="22" name="Rectangle 21"/>
           <p:cNvSpPr/>
           <p:nvPr/>
         </p:nvSpPr>
@@ -5559,7 +5611,7 @@
       </p:sp>
       <p:sp>
         <p:nvSpPr>
-          <p:cNvPr id="22" name="Rectangle 21"/>
+          <p:cNvPr id="23" name="Rectangle 22"/>
           <p:cNvSpPr/>
           <p:nvPr/>
         </p:nvSpPr>
@@ -5600,7 +5652,7 @@
       </p:sp>
       <p:sp>
         <p:nvSpPr>
-          <p:cNvPr id="23" name="TextBox 22"/>
+          <p:cNvPr id="24" name="TextBox 23"/>
           <p:cNvSpPr txBox="1"/>
           <p:nvPr/>
         </p:nvSpPr>
@@ -5718,7 +5770,7 @@
       </p:sp>
       <p:sp>
         <p:nvSpPr>
-          <p:cNvPr id="24" name="TextBox 23"/>
+          <p:cNvPr id="25" name="TextBox 24"/>
           <p:cNvSpPr txBox="1"/>
           <p:nvPr/>
         </p:nvSpPr>

--- a/assets/memos/E7-memo.pptx
+++ b/assets/memos/E7-memo.pptx
@@ -3084,9 +3084,12 @@
   <p:cSld>
     <p:bg>
       <p:bgPr>
-        <a:solidFill>
-          <a:srgbClr val="FFFFFF"/>
-        </a:solidFill>
+        <a:blipFill>
+          <a:blip r:embed="rId2"/>
+          <a:stretch>
+            <a:fillRect/>
+          </a:stretch>
+        </a:blipFill>
         <a:effectLst/>
       </p:bgPr>
     </p:bg>
@@ -3097,35 +3100,9 @@
         <p:nvPr/>
       </p:nvGrpSpPr>
       <p:grpSpPr/>
-      <p:pic>
-        <p:nvPicPr>
-          <p:cNvPr id="2" name="Picture 1" descr="bg-p1.png"/>
-          <p:cNvPicPr>
-            <a:picLocks noChangeAspect="1"/>
-          </p:cNvPicPr>
-          <p:nvPr/>
-        </p:nvPicPr>
-        <p:blipFill>
-          <a:blip r:embed="rId2">
-            <a:alphaModFix amt="80000"/>
-          </a:blip>
-          <a:stretch>
-            <a:fillRect/>
-          </a:stretch>
-        </p:blipFill>
-        <p:spPr>
-          <a:xfrm>
-            <a:off x="0" y="0"/>
-            <a:ext cx="7556399" cy="10692000"/>
-          </a:xfrm>
-          <a:prstGeom prst="rect">
-            <a:avLst/>
-          </a:prstGeom>
-        </p:spPr>
-      </p:pic>
-      <p:sp>
-        <p:nvSpPr>
-          <p:cNvPr id="3" name="TextBox 2"/>
+      <p:sp>
+        <p:nvSpPr>
+          <p:cNvPr id="2" name="TextBox 1"/>
           <p:cNvSpPr txBox="1"/>
           <p:nvPr/>
         </p:nvSpPr>
@@ -3186,7 +3163,7 @@
       </p:sp>
       <p:sp>
         <p:nvSpPr>
-          <p:cNvPr id="4" name="Rectangle 3"/>
+          <p:cNvPr id="3" name="Rectangle 2"/>
           <p:cNvSpPr/>
           <p:nvPr/>
         </p:nvSpPr>
@@ -3227,7 +3204,7 @@
       </p:sp>
       <p:sp>
         <p:nvSpPr>
-          <p:cNvPr id="5" name="Rectangle 4"/>
+          <p:cNvPr id="4" name="Rectangle 3"/>
           <p:cNvSpPr/>
           <p:nvPr/>
         </p:nvSpPr>
@@ -3268,7 +3245,7 @@
       </p:sp>
       <p:sp>
         <p:nvSpPr>
-          <p:cNvPr id="6" name="Rectangle 5"/>
+          <p:cNvPr id="5" name="Rectangle 4"/>
           <p:cNvSpPr/>
           <p:nvPr/>
         </p:nvSpPr>
@@ -3309,7 +3286,7 @@
       </p:sp>
       <p:sp>
         <p:nvSpPr>
-          <p:cNvPr id="7" name="TextBox 6"/>
+          <p:cNvPr id="6" name="TextBox 5"/>
           <p:cNvSpPr txBox="1"/>
           <p:nvPr/>
         </p:nvSpPr>
@@ -3351,7 +3328,7 @@
       </p:sp>
       <p:sp>
         <p:nvSpPr>
-          <p:cNvPr id="8" name="TextBox 7"/>
+          <p:cNvPr id="7" name="TextBox 6"/>
           <p:cNvSpPr txBox="1"/>
           <p:nvPr/>
         </p:nvSpPr>
@@ -3393,7 +3370,7 @@
       </p:sp>
       <p:sp>
         <p:nvSpPr>
-          <p:cNvPr id="9" name="TextBox 8"/>
+          <p:cNvPr id="8" name="TextBox 7"/>
           <p:cNvSpPr txBox="1"/>
           <p:nvPr/>
         </p:nvSpPr>
@@ -3492,7 +3469,7 @@
       </p:sp>
       <p:sp>
         <p:nvSpPr>
-          <p:cNvPr id="10" name="Rectangle 9"/>
+          <p:cNvPr id="9" name="Rectangle 8"/>
           <p:cNvSpPr/>
           <p:nvPr/>
         </p:nvSpPr>
@@ -3533,7 +3510,7 @@
       </p:sp>
       <p:sp>
         <p:nvSpPr>
-          <p:cNvPr id="11" name="Rectangle 10"/>
+          <p:cNvPr id="10" name="Rectangle 9"/>
           <p:cNvSpPr/>
           <p:nvPr/>
         </p:nvSpPr>
@@ -3574,7 +3551,7 @@
       </p:sp>
       <p:sp>
         <p:nvSpPr>
-          <p:cNvPr id="12" name="Rectangle 11"/>
+          <p:cNvPr id="11" name="Rectangle 10"/>
           <p:cNvSpPr/>
           <p:nvPr/>
         </p:nvSpPr>
@@ -3615,7 +3592,7 @@
       </p:sp>
       <p:sp>
         <p:nvSpPr>
-          <p:cNvPr id="13" name="TextBox 12"/>
+          <p:cNvPr id="12" name="TextBox 11"/>
           <p:cNvSpPr txBox="1"/>
           <p:nvPr/>
         </p:nvSpPr>
@@ -3657,7 +3634,7 @@
       </p:sp>
       <p:sp>
         <p:nvSpPr>
-          <p:cNvPr id="14" name="TextBox 13"/>
+          <p:cNvPr id="13" name="TextBox 12"/>
           <p:cNvSpPr txBox="1"/>
           <p:nvPr/>
         </p:nvSpPr>
@@ -3699,7 +3676,7 @@
       </p:sp>
       <p:sp>
         <p:nvSpPr>
-          <p:cNvPr id="15" name="TextBox 14"/>
+          <p:cNvPr id="14" name="TextBox 13"/>
           <p:cNvSpPr txBox="1"/>
           <p:nvPr/>
         </p:nvSpPr>
@@ -3798,7 +3775,7 @@
       </p:sp>
       <p:sp>
         <p:nvSpPr>
-          <p:cNvPr id="16" name="Rectangle 15"/>
+          <p:cNvPr id="15" name="Rectangle 14"/>
           <p:cNvSpPr/>
           <p:nvPr/>
         </p:nvSpPr>
@@ -3839,7 +3816,7 @@
       </p:sp>
       <p:sp>
         <p:nvSpPr>
-          <p:cNvPr id="17" name="Rectangle 16"/>
+          <p:cNvPr id="16" name="Rectangle 15"/>
           <p:cNvSpPr/>
           <p:nvPr/>
         </p:nvSpPr>
@@ -3880,7 +3857,7 @@
       </p:sp>
       <p:sp>
         <p:nvSpPr>
-          <p:cNvPr id="18" name="Rectangle 17"/>
+          <p:cNvPr id="17" name="Rectangle 16"/>
           <p:cNvSpPr/>
           <p:nvPr/>
         </p:nvSpPr>
@@ -3921,7 +3898,7 @@
       </p:sp>
       <p:sp>
         <p:nvSpPr>
-          <p:cNvPr id="19" name="TextBox 18"/>
+          <p:cNvPr id="18" name="TextBox 17"/>
           <p:cNvSpPr txBox="1"/>
           <p:nvPr/>
         </p:nvSpPr>
@@ -3963,7 +3940,7 @@
       </p:sp>
       <p:sp>
         <p:nvSpPr>
-          <p:cNvPr id="20" name="TextBox 19"/>
+          <p:cNvPr id="19" name="TextBox 18"/>
           <p:cNvSpPr txBox="1"/>
           <p:nvPr/>
         </p:nvSpPr>
@@ -4005,7 +3982,7 @@
       </p:sp>
       <p:sp>
         <p:nvSpPr>
-          <p:cNvPr id="21" name="TextBox 20"/>
+          <p:cNvPr id="20" name="TextBox 19"/>
           <p:cNvSpPr txBox="1"/>
           <p:nvPr/>
         </p:nvSpPr>
@@ -4085,7 +4062,7 @@
       </p:sp>
       <p:sp>
         <p:nvSpPr>
-          <p:cNvPr id="22" name="Rectangle 21"/>
+          <p:cNvPr id="21" name="Rectangle 20"/>
           <p:cNvSpPr/>
           <p:nvPr/>
         </p:nvSpPr>
@@ -4126,7 +4103,7 @@
       </p:sp>
       <p:sp>
         <p:nvSpPr>
-          <p:cNvPr id="23" name="Rectangle 22"/>
+          <p:cNvPr id="22" name="Rectangle 21"/>
           <p:cNvSpPr/>
           <p:nvPr/>
         </p:nvSpPr>
@@ -4167,7 +4144,7 @@
       </p:sp>
       <p:sp>
         <p:nvSpPr>
-          <p:cNvPr id="24" name="Rectangle 23"/>
+          <p:cNvPr id="23" name="Rectangle 22"/>
           <p:cNvSpPr/>
           <p:nvPr/>
         </p:nvSpPr>
@@ -4208,7 +4185,7 @@
       </p:sp>
       <p:sp>
         <p:nvSpPr>
-          <p:cNvPr id="25" name="TextBox 24"/>
+          <p:cNvPr id="24" name="TextBox 23"/>
           <p:cNvSpPr txBox="1"/>
           <p:nvPr/>
         </p:nvSpPr>
@@ -4250,7 +4227,7 @@
       </p:sp>
       <p:sp>
         <p:nvSpPr>
-          <p:cNvPr id="26" name="TextBox 25"/>
+          <p:cNvPr id="25" name="TextBox 24"/>
           <p:cNvSpPr txBox="1"/>
           <p:nvPr/>
         </p:nvSpPr>
@@ -4292,7 +4269,7 @@
       </p:sp>
       <p:sp>
         <p:nvSpPr>
-          <p:cNvPr id="27" name="TextBox 26"/>
+          <p:cNvPr id="26" name="TextBox 25"/>
           <p:cNvSpPr txBox="1"/>
           <p:nvPr/>
         </p:nvSpPr>
@@ -4391,7 +4368,7 @@
       </p:sp>
       <p:sp>
         <p:nvSpPr>
-          <p:cNvPr id="28" name="Rectangle 27"/>
+          <p:cNvPr id="27" name="Rectangle 26"/>
           <p:cNvSpPr/>
           <p:nvPr/>
         </p:nvSpPr>
@@ -4434,7 +4411,7 @@
       </p:sp>
       <p:sp>
         <p:nvSpPr>
-          <p:cNvPr id="29" name="TextBox 28"/>
+          <p:cNvPr id="28" name="TextBox 27"/>
           <p:cNvSpPr txBox="1"/>
           <p:nvPr/>
         </p:nvSpPr>
@@ -4495,7 +4472,7 @@
       </p:sp>
       <p:sp>
         <p:nvSpPr>
-          <p:cNvPr id="30" name="TextBox 29"/>
+          <p:cNvPr id="29" name="TextBox 28"/>
           <p:cNvSpPr txBox="1"/>
           <p:nvPr/>
         </p:nvSpPr>
@@ -4548,9 +4525,12 @@
   <p:cSld>
     <p:bg>
       <p:bgPr>
-        <a:solidFill>
-          <a:srgbClr val="FFFFFF"/>
-        </a:solidFill>
+        <a:blipFill>
+          <a:blip r:embed="rId2"/>
+          <a:stretch>
+            <a:fillRect/>
+          </a:stretch>
+        </a:blipFill>
         <a:effectLst/>
       </p:bgPr>
     </p:bg>
@@ -4561,35 +4541,9 @@
         <p:nvPr/>
       </p:nvGrpSpPr>
       <p:grpSpPr/>
-      <p:pic>
-        <p:nvPicPr>
-          <p:cNvPr id="2" name="Picture 1" descr="bg-p2.png"/>
-          <p:cNvPicPr>
-            <a:picLocks noChangeAspect="1"/>
-          </p:cNvPicPr>
-          <p:nvPr/>
-        </p:nvPicPr>
-        <p:blipFill>
-          <a:blip r:embed="rId2">
-            <a:alphaModFix amt="80000"/>
-          </a:blip>
-          <a:stretch>
-            <a:fillRect/>
-          </a:stretch>
-        </p:blipFill>
-        <p:spPr>
-          <a:xfrm>
-            <a:off x="0" y="0"/>
-            <a:ext cx="7556399" cy="10692000"/>
-          </a:xfrm>
-          <a:prstGeom prst="rect">
-            <a:avLst/>
-          </a:prstGeom>
-        </p:spPr>
-      </p:pic>
-      <p:sp>
-        <p:nvSpPr>
-          <p:cNvPr id="3" name="TextBox 2"/>
+      <p:sp>
+        <p:nvSpPr>
+          <p:cNvPr id="2" name="TextBox 1"/>
           <p:cNvSpPr txBox="1"/>
           <p:nvPr/>
         </p:nvSpPr>
@@ -4650,7 +4604,7 @@
       </p:sp>
       <p:sp>
         <p:nvSpPr>
-          <p:cNvPr id="4" name="Rectangle 3"/>
+          <p:cNvPr id="3" name="Rectangle 2"/>
           <p:cNvSpPr/>
           <p:nvPr/>
         </p:nvSpPr>
@@ -4691,7 +4645,7 @@
       </p:sp>
       <p:sp>
         <p:nvSpPr>
-          <p:cNvPr id="5" name="Rectangle 4"/>
+          <p:cNvPr id="4" name="Rectangle 3"/>
           <p:cNvSpPr/>
           <p:nvPr/>
         </p:nvSpPr>
@@ -4732,7 +4686,7 @@
       </p:sp>
       <p:sp>
         <p:nvSpPr>
-          <p:cNvPr id="6" name="Rectangle 5"/>
+          <p:cNvPr id="5" name="Rectangle 4"/>
           <p:cNvSpPr/>
           <p:nvPr/>
         </p:nvSpPr>
@@ -4773,7 +4727,7 @@
       </p:sp>
       <p:sp>
         <p:nvSpPr>
-          <p:cNvPr id="7" name="TextBox 6"/>
+          <p:cNvPr id="6" name="TextBox 5"/>
           <p:cNvSpPr txBox="1"/>
           <p:nvPr/>
         </p:nvSpPr>
@@ -4815,7 +4769,7 @@
       </p:sp>
       <p:sp>
         <p:nvSpPr>
-          <p:cNvPr id="8" name="TextBox 7"/>
+          <p:cNvPr id="7" name="TextBox 6"/>
           <p:cNvSpPr txBox="1"/>
           <p:nvPr/>
         </p:nvSpPr>
@@ -4857,7 +4811,7 @@
       </p:sp>
       <p:sp>
         <p:nvSpPr>
-          <p:cNvPr id="9" name="TextBox 8"/>
+          <p:cNvPr id="8" name="TextBox 7"/>
           <p:cNvSpPr txBox="1"/>
           <p:nvPr/>
         </p:nvSpPr>
@@ -4956,7 +4910,7 @@
       </p:sp>
       <p:sp>
         <p:nvSpPr>
-          <p:cNvPr id="10" name="Rectangle 9"/>
+          <p:cNvPr id="9" name="Rectangle 8"/>
           <p:cNvSpPr/>
           <p:nvPr/>
         </p:nvSpPr>
@@ -4997,7 +4951,7 @@
       </p:sp>
       <p:sp>
         <p:nvSpPr>
-          <p:cNvPr id="11" name="Rectangle 10"/>
+          <p:cNvPr id="10" name="Rectangle 9"/>
           <p:cNvSpPr/>
           <p:nvPr/>
         </p:nvSpPr>
@@ -5038,7 +4992,7 @@
       </p:sp>
       <p:sp>
         <p:nvSpPr>
-          <p:cNvPr id="12" name="Rectangle 11"/>
+          <p:cNvPr id="11" name="Rectangle 10"/>
           <p:cNvSpPr/>
           <p:nvPr/>
         </p:nvSpPr>
@@ -5079,7 +5033,7 @@
       </p:sp>
       <p:sp>
         <p:nvSpPr>
-          <p:cNvPr id="13" name="TextBox 12"/>
+          <p:cNvPr id="12" name="TextBox 11"/>
           <p:cNvSpPr txBox="1"/>
           <p:nvPr/>
         </p:nvSpPr>
@@ -5121,7 +5075,7 @@
       </p:sp>
       <p:sp>
         <p:nvSpPr>
-          <p:cNvPr id="14" name="TextBox 13"/>
+          <p:cNvPr id="13" name="TextBox 12"/>
           <p:cNvSpPr txBox="1"/>
           <p:nvPr/>
         </p:nvSpPr>
@@ -5163,7 +5117,7 @@
       </p:sp>
       <p:sp>
         <p:nvSpPr>
-          <p:cNvPr id="15" name="TextBox 14"/>
+          <p:cNvPr id="14" name="TextBox 13"/>
           <p:cNvSpPr txBox="1"/>
           <p:nvPr/>
         </p:nvSpPr>
@@ -5262,7 +5216,7 @@
       </p:sp>
       <p:sp>
         <p:nvSpPr>
-          <p:cNvPr id="16" name="Rectangle 15"/>
+          <p:cNvPr id="15" name="Rectangle 14"/>
           <p:cNvSpPr/>
           <p:nvPr/>
         </p:nvSpPr>
@@ -5303,7 +5257,7 @@
       </p:sp>
       <p:sp>
         <p:nvSpPr>
-          <p:cNvPr id="17" name="Rectangle 16"/>
+          <p:cNvPr id="16" name="Rectangle 15"/>
           <p:cNvSpPr/>
           <p:nvPr/>
         </p:nvSpPr>
@@ -5344,7 +5298,7 @@
       </p:sp>
       <p:sp>
         <p:nvSpPr>
-          <p:cNvPr id="18" name="Rectangle 17"/>
+          <p:cNvPr id="17" name="Rectangle 16"/>
           <p:cNvSpPr/>
           <p:nvPr/>
         </p:nvSpPr>
@@ -5385,7 +5339,7 @@
       </p:sp>
       <p:sp>
         <p:nvSpPr>
-          <p:cNvPr id="19" name="TextBox 18"/>
+          <p:cNvPr id="18" name="TextBox 17"/>
           <p:cNvSpPr txBox="1"/>
           <p:nvPr/>
         </p:nvSpPr>
@@ -5427,7 +5381,7 @@
       </p:sp>
       <p:sp>
         <p:nvSpPr>
-          <p:cNvPr id="20" name="TextBox 19"/>
+          <p:cNvPr id="19" name="TextBox 18"/>
           <p:cNvSpPr txBox="1"/>
           <p:nvPr/>
         </p:nvSpPr>
@@ -5469,7 +5423,7 @@
       </p:sp>
       <p:sp>
         <p:nvSpPr>
-          <p:cNvPr id="21" name="TextBox 20"/>
+          <p:cNvPr id="20" name="TextBox 19"/>
           <p:cNvSpPr txBox="1"/>
           <p:nvPr/>
         </p:nvSpPr>
@@ -5568,7 +5522,7 @@
       </p:sp>
       <p:sp>
         <p:nvSpPr>
-          <p:cNvPr id="22" name="Rectangle 21"/>
+          <p:cNvPr id="21" name="Rectangle 20"/>
           <p:cNvSpPr/>
           <p:nvPr/>
         </p:nvSpPr>
@@ -5611,7 +5565,7 @@
       </p:sp>
       <p:sp>
         <p:nvSpPr>
-          <p:cNvPr id="23" name="Rectangle 22"/>
+          <p:cNvPr id="22" name="Rectangle 21"/>
           <p:cNvSpPr/>
           <p:nvPr/>
         </p:nvSpPr>
@@ -5652,7 +5606,7 @@
       </p:sp>
       <p:sp>
         <p:nvSpPr>
-          <p:cNvPr id="24" name="TextBox 23"/>
+          <p:cNvPr id="23" name="TextBox 22"/>
           <p:cNvSpPr txBox="1"/>
           <p:nvPr/>
         </p:nvSpPr>
@@ -5770,7 +5724,7 @@
       </p:sp>
       <p:sp>
         <p:nvSpPr>
-          <p:cNvPr id="25" name="TextBox 24"/>
+          <p:cNvPr id="24" name="TextBox 23"/>
           <p:cNvSpPr txBox="1"/>
           <p:nvPr/>
         </p:nvSpPr>
